--- a/system-design-101/vi/lessons/sd-11-021/slides/sd-11-021.pptx
+++ b/system-design-101/vi/lessons/sd-11-021/slides/sd-11-021.pptx
@@ -9998,7 +9998,7 @@
       </p:sp>
       <p:sp>
         <p:nvSpPr>
-          <p:cNvPr id="7" name="Text richtext-1792420770856-965072575"/>
+          <p:cNvPr id="7" name="Text richtext-1792421990202-210904358"/>
           <p:cNvSpPr/>
           <p:nvPr/>
         </p:nvSpPr>
@@ -10340,7 +10340,7 @@
       </p:sp>
       <p:sp>
         <p:nvSpPr>
-          <p:cNvPr id="11" name="Text richtext-1792420770876-959444071"/>
+          <p:cNvPr id="11" name="Text richtext-1792421990223-288226208"/>
           <p:cNvSpPr/>
           <p:nvPr/>
         </p:nvSpPr>
@@ -10534,31 +10534,23 @@
               <a:lnSpc>
                 <a:spcPts val="3510"/>
               </a:lnSpc>
+              <a:spcAft>
+                <a:spcPts val="1500"/>
+              </a:spcAft>
               <a:buSzPct val="100000"/>
               <a:buFont typeface="Arial"/>
               <a:buChar char="•"/>
             </a:pPr>
             <a:r>
-              <a:rPr lang="en-US" sz="2700" dirty="0" spc="-99" kern="0">
-                <a:solidFill>
-                  <a:srgbClr val="14161C"/>
-                </a:solidFill>
-                <a:latin typeface="Be Vietnam Pro" pitchFamily="34" charset="0"/>
-                <a:ea typeface="Be Vietnam Pro" pitchFamily="34" charset="-122"/>
-                <a:cs typeface="Be Vietnam Pro" pitchFamily="34" charset="-120"/>
-              </a:rPr>
-              <a:t>Trỏ</a:t>
-            </a:r>
-            <a:r>
-              <a:rPr lang="en-US" sz="2700" dirty="0" spc="-14" kern="0">
-                <a:solidFill>
-                  <a:srgbClr val="14161C"/>
-                </a:solidFill>
-                <a:latin typeface="Be Vietnam Pro" pitchFamily="34" charset="0"/>
-                <a:ea typeface="Be Vietnam Pro" pitchFamily="34" charset="-122"/>
-                <a:cs typeface="Be Vietnam Pro" pitchFamily="34" charset="-120"/>
-              </a:rPr>
-              <a:t> tới</a:t>
+              <a:rPr lang="en-US" sz="2700" dirty="0" spc="-80" kern="0">
+                <a:solidFill>
+                  <a:srgbClr val="14161C"/>
+                </a:solidFill>
+                <a:latin typeface="Be Vietnam Pro" pitchFamily="34" charset="0"/>
+                <a:ea typeface="Be Vietnam Pro" pitchFamily="34" charset="-122"/>
+                <a:cs typeface="Be Vietnam Pro" pitchFamily="34" charset="-120"/>
+              </a:rPr>
+              <a:t>Tới</a:t>
             </a:r>
             <a:r>
               <a:rPr lang="en-US" sz="2700" dirty="0" spc="-1" kern="0">
@@ -10569,18 +10561,84 @@
                 <a:ea typeface="Be Vietnam Pro" pitchFamily="34" charset="-122"/>
                 <a:cs typeface="Be Vietnam Pro" pitchFamily="34" charset="-120"/>
               </a:rPr>
+              <a:t> dịch</a:t>
+            </a:r>
+            <a:r>
+              <a:rPr lang="en-US" sz="2700" dirty="0" spc="-2" kern="0">
+                <a:solidFill>
+                  <a:srgbClr val="14161C"/>
+                </a:solidFill>
+                <a:latin typeface="Be Vietnam Pro" pitchFamily="34" charset="0"/>
+                <a:ea typeface="Be Vietnam Pro" pitchFamily="34" charset="-122"/>
+                <a:cs typeface="Be Vietnam Pro" pitchFamily="34" charset="-120"/>
+              </a:rPr>
+              <a:t> vụ</a:t>
+            </a:r>
+            <a:r>
+              <a:rPr lang="en-US" sz="2700" dirty="0" spc="-47" kern="0">
+                <a:solidFill>
+                  <a:srgbClr val="14161C"/>
+                </a:solidFill>
+                <a:latin typeface="Be Vietnam Pro" pitchFamily="34" charset="0"/>
+                <a:ea typeface="Be Vietnam Pro" pitchFamily="34" charset="-122"/>
+                <a:cs typeface="Be Vietnam Pro" pitchFamily="34" charset="-120"/>
+              </a:rPr>
+              <a:t> AWS,</a:t>
+            </a:r>
+            <a:r>
+              <a:rPr lang="en-US" sz="2700" dirty="0" spc="-4" kern="0">
+                <a:solidFill>
+                  <a:srgbClr val="14161C"/>
+                </a:solidFill>
+                <a:latin typeface="Be Vietnam Pro" pitchFamily="34" charset="0"/>
+                <a:ea typeface="Be Vietnam Pro" pitchFamily="34" charset="-122"/>
+                <a:cs typeface="Be Vietnam Pro" pitchFamily="34" charset="-120"/>
+              </a:rPr>
+              <a:t> hoặc</a:t>
+            </a:r>
+            <a:r>
+              <a:rPr lang="en-US" sz="2700" dirty="0" spc="-1" kern="0">
+                <a:solidFill>
+                  <a:srgbClr val="14161C"/>
+                </a:solidFill>
+                <a:latin typeface="Be Vietnam Pro" pitchFamily="34" charset="0"/>
+                <a:ea typeface="Be Vietnam Pro" pitchFamily="34" charset="-122"/>
+                <a:cs typeface="Be Vietnam Pro" pitchFamily="34" charset="-120"/>
+              </a:rPr>
               <a:t> dịch vụ</a:t>
             </a:r>
             <a:r>
-              <a:rPr lang="en-US" sz="2700" dirty="0" spc="-48" kern="0">
-                <a:solidFill>
-                  <a:srgbClr val="14161C"/>
-                </a:solidFill>
-                <a:latin typeface="Be Vietnam Pro" pitchFamily="34" charset="0"/>
-                <a:ea typeface="Be Vietnam Pro" pitchFamily="34" charset="-122"/>
-                <a:cs typeface="Be Vietnam Pro" pitchFamily="34" charset="-120"/>
-              </a:rPr>
-              <a:t> AWS,</a:t>
+              <a:rPr lang="en-US" sz="2700" dirty="0" spc="9" kern="0">
+                <a:solidFill>
+                  <a:srgbClr val="14161C"/>
+                </a:solidFill>
+                <a:latin typeface="Be Vietnam Pro" pitchFamily="34" charset="0"/>
+                <a:ea typeface="Be Vietnam Pro" pitchFamily="34" charset="-122"/>
+                <a:cs typeface="Be Vietnam Pro" pitchFamily="34" charset="-120"/>
+              </a:rPr>
+              <a:t> được đưa</a:t>
+            </a:r>
+            <a:r>
+              <a:rPr lang="en-US" sz="2700" dirty="0" spc="-40" kern="0">
+                <a:solidFill>
+                  <a:srgbClr val="14161C"/>
+                </a:solidFill>
+                <a:latin typeface="Be Vietnam Pro" pitchFamily="34" charset="0"/>
+                <a:ea typeface="Be Vietnam Pro" pitchFamily="34" charset="-122"/>
+                <a:cs typeface="Be Vietnam Pro" pitchFamily="34" charset="-120"/>
+              </a:rPr>
+              <a:t> ra</a:t>
+            </a:r>
+            <a:r>
+              <a:rPr lang="en-US" sz="2700" dirty="0" spc="-1" kern="0">
+                <a:solidFill>
+                  <a:srgbClr val="14161C"/>
+                </a:solidFill>
+                <a:latin typeface="Be Vietnam Pro" pitchFamily="34" charset="0"/>
+                <a:ea typeface="Be Vietnam Pro" pitchFamily="34" charset="-122"/>
+                <a:cs typeface="Be Vietnam Pro" pitchFamily="34" charset="-120"/>
+              </a:rPr>
+              <a:t> từ</a:t>
             </a:r>
             <a:r>
               <a:rPr lang="en-US" sz="2700" dirty="0" spc="2" kern="0">
@@ -10594,6 +10652,61 @@
               <a:t> VPC</a:t>
             </a:r>
             <a:r>
+              <a:rPr lang="en-US" sz="2700" dirty="0" spc="0" kern="0">
+                <a:solidFill>
+                  <a:srgbClr val="14161C"/>
+                </a:solidFill>
+                <a:latin typeface="Be Vietnam Pro" pitchFamily="34" charset="0"/>
+                <a:ea typeface="Be Vietnam Pro" pitchFamily="34" charset="-122"/>
+                <a:cs typeface="Be Vietnam Pro" pitchFamily="34" charset="-120"/>
+              </a:rPr>
+              <a:t> khác.</a:t>
+            </a:r>
+            <a:endParaRPr lang="en-US" sz="2700" dirty="0"/>
+          </a:p>
+          <a:p>
+            <a:pPr algn="l" marL="342900" indent="-244981">
+              <a:lnSpc>
+                <a:spcPts val="3510"/>
+              </a:lnSpc>
+              <a:buSzPct val="100000"/>
+              <a:buFont typeface="Arial"/>
+              <a:buChar char="•"/>
+            </a:pPr>
+            <a:r>
+              <a:rPr lang="en-US" sz="2700" dirty="0" spc="-2" kern="0">
+                <a:solidFill>
+                  <a:srgbClr val="14161C"/>
+                </a:solidFill>
+                <a:latin typeface="Be Vietnam Pro" pitchFamily="34" charset="0"/>
+                <a:ea typeface="Be Vietnam Pro" pitchFamily="34" charset="-122"/>
+                <a:cs typeface="Be Vietnam Pro" pitchFamily="34" charset="-120"/>
+              </a:rPr>
+              <a:t>Không phải</a:t>
+            </a:r>
+            <a:r>
+              <a:rPr lang="en-US" sz="2700" dirty="0" spc="20" kern="0">
+                <a:solidFill>
+                  <a:srgbClr val="14161C"/>
+                </a:solidFill>
+                <a:latin typeface="Be Vietnam Pro" pitchFamily="34" charset="0"/>
+                <a:ea typeface="Be Vietnam Pro" pitchFamily="34" charset="-122"/>
+                <a:cs typeface="Be Vietnam Pro" pitchFamily="34" charset="-120"/>
+              </a:rPr>
+              <a:t> định</a:t>
+            </a:r>
+            <a:r>
+              <a:rPr lang="en-US" sz="2700" dirty="0" spc="-17" kern="0">
+                <a:solidFill>
+                  <a:srgbClr val="14161C"/>
+                </a:solidFill>
+                <a:latin typeface="Be Vietnam Pro" pitchFamily="34" charset="0"/>
+                <a:ea typeface="Be Vietnam Pro" pitchFamily="34" charset="-122"/>
+                <a:cs typeface="Be Vietnam Pro" pitchFamily="34" charset="-120"/>
+              </a:rPr>
+              <a:t> tuyến</a:t>
+            </a:r>
+            <a:r>
               <a:rPr lang="en-US" sz="2700" dirty="0" spc="1" kern="0">
                 <a:solidFill>
                   <a:srgbClr val="14161C"/>
@@ -10602,40 +10715,7 @@
                 <a:ea typeface="Be Vietnam Pro" pitchFamily="34" charset="-122"/>
                 <a:cs typeface="Be Vietnam Pro" pitchFamily="34" charset="-120"/>
               </a:rPr>
-              <a:t> khác,</a:t>
-            </a:r>
-            <a:r>
-              <a:rPr lang="en-US" sz="2700" dirty="0" spc="-7" kern="0">
-                <a:solidFill>
-                  <a:srgbClr val="14161C"/>
-                </a:solidFill>
-                <a:latin typeface="Be Vietnam Pro" pitchFamily="34" charset="0"/>
-                <a:ea typeface="Be Vietnam Pro" pitchFamily="34" charset="-122"/>
-                <a:cs typeface="Be Vietnam Pro" pitchFamily="34" charset="-120"/>
-              </a:rPr>
-              <a:t> bên</a:t>
-            </a:r>
-            <a:r>
-              <a:rPr lang="en-US" sz="2700" dirty="0" spc="-1" kern="0">
-                <a:solidFill>
-                  <a:srgbClr val="14161C"/>
-                </a:solidFill>
-                <a:latin typeface="Be Vietnam Pro" pitchFamily="34" charset="0"/>
-                <a:ea typeface="Be Vietnam Pro" pitchFamily="34" charset="-122"/>
-                <a:cs typeface="Be Vietnam Pro" pitchFamily="34" charset="-120"/>
-              </a:rPr>
-              <a:t> thứ</a:t>
-            </a:r>
-            <a:r>
-              <a:rPr lang="en-US" sz="2700" dirty="0" spc="-7" kern="0">
-                <a:solidFill>
-                  <a:srgbClr val="14161C"/>
-                </a:solidFill>
-                <a:latin typeface="Be Vietnam Pro" pitchFamily="34" charset="0"/>
-                <a:ea typeface="Be Vietnam Pro" pitchFamily="34" charset="-122"/>
-                <a:cs typeface="Be Vietnam Pro" pitchFamily="34" charset="-120"/>
-              </a:rPr>
-              <a:t> ba.</a:t>
+              <a:t> cả VPC.</a:t>
             </a:r>
             <a:endParaRPr lang="en-US" sz="2700" dirty="0"/>
           </a:p>
